--- a/output/fig-flowchart/fig-flowchart.pptx
+++ b/output/fig-flowchart/fig-flowchart.pptx
@@ -2673,7 +2673,7 @@
           </p:nvSpPr>
           <p:spPr>
             <a:xfrm>
-              <a:off x="5056064" y="1205969"/>
+              <a:off x="3638744" y="1683047"/>
               <a:ext cx="3969630" cy="1392760"/>
             </a:xfrm>
             <a:custGeom>
@@ -2860,7 +2860,7 @@
           </p:nvSpPr>
           <p:spPr>
             <a:xfrm>
-              <a:off x="5272064" y="1421969"/>
+              <a:off x="3854744" y="1899047"/>
               <a:ext cx="1717700" cy="92080"/>
             </a:xfrm>
             <a:prstGeom prst="rect">
@@ -2903,7 +2903,7 @@
           </p:nvSpPr>
           <p:spPr>
             <a:xfrm>
-              <a:off x="5272064" y="1595705"/>
+              <a:off x="3854744" y="2072783"/>
               <a:ext cx="2925531" cy="92080"/>
             </a:xfrm>
             <a:prstGeom prst="rect">
@@ -2946,7 +2946,7 @@
           </p:nvSpPr>
           <p:spPr>
             <a:xfrm>
-              <a:off x="5272064" y="1769441"/>
+              <a:off x="3854744" y="2246519"/>
               <a:ext cx="3368649" cy="92080"/>
             </a:xfrm>
             <a:prstGeom prst="rect">
@@ -2989,7 +2989,7 @@
           </p:nvSpPr>
           <p:spPr>
             <a:xfrm>
-              <a:off x="5272064" y="1943177"/>
+              <a:off x="3854744" y="2420255"/>
               <a:ext cx="1885675" cy="92080"/>
             </a:xfrm>
             <a:prstGeom prst="rect">
@@ -3032,7 +3032,7 @@
           </p:nvSpPr>
           <p:spPr>
             <a:xfrm>
-              <a:off x="5272064" y="2116913"/>
+              <a:off x="3854744" y="2593991"/>
               <a:ext cx="2641701" cy="92080"/>
             </a:xfrm>
             <a:prstGeom prst="rect">
@@ -3075,7 +3075,7 @@
           </p:nvSpPr>
           <p:spPr>
             <a:xfrm>
-              <a:off x="5272064" y="2290649"/>
+              <a:off x="3854744" y="2767727"/>
               <a:ext cx="3537630" cy="92080"/>
             </a:xfrm>
             <a:prstGeom prst="rect">
@@ -3118,7 +3118,7 @@
           </p:nvSpPr>
           <p:spPr>
             <a:xfrm>
-              <a:off x="2310761" y="2121250"/>
+              <a:off x="2310761" y="3075406"/>
               <a:ext cx="2693676" cy="1343291"/>
             </a:xfrm>
             <a:custGeom>
@@ -3305,7 +3305,7 @@
           </p:nvSpPr>
           <p:spPr>
             <a:xfrm>
-              <a:off x="2526761" y="2337250"/>
+              <a:off x="2526761" y="3291406"/>
               <a:ext cx="1995677" cy="106619"/>
             </a:xfrm>
             <a:prstGeom prst="rect">
@@ -3348,7 +3348,7 @@
           </p:nvSpPr>
           <p:spPr>
             <a:xfrm>
-              <a:off x="2526761" y="2538418"/>
+              <a:off x="2526761" y="3492574"/>
               <a:ext cx="1535369" cy="106619"/>
             </a:xfrm>
             <a:prstGeom prst="rect">
@@ -3391,7 +3391,7 @@
           </p:nvSpPr>
           <p:spPr>
             <a:xfrm>
-              <a:off x="2526761" y="2739586"/>
+              <a:off x="2526761" y="3693742"/>
               <a:ext cx="1540306" cy="106619"/>
             </a:xfrm>
             <a:prstGeom prst="rect">
@@ -3434,7 +3434,7 @@
           </p:nvSpPr>
           <p:spPr>
             <a:xfrm>
-              <a:off x="2526761" y="2940754"/>
+              <a:off x="2526761" y="3894910"/>
               <a:ext cx="2261676" cy="106619"/>
             </a:xfrm>
             <a:prstGeom prst="rect">
@@ -3477,7 +3477,7 @@
           </p:nvSpPr>
           <p:spPr>
             <a:xfrm>
-              <a:off x="2526761" y="3141922"/>
+              <a:off x="2526761" y="4096078"/>
               <a:ext cx="1362821" cy="106619"/>
             </a:xfrm>
             <a:prstGeom prst="rect">
@@ -3520,7 +3520,7 @@
           </p:nvSpPr>
           <p:spPr>
             <a:xfrm>
-              <a:off x="991922" y="4013263"/>
+              <a:off x="991922" y="4776588"/>
               <a:ext cx="2588155" cy="739787"/>
             </a:xfrm>
             <a:custGeom>
@@ -3707,7 +3707,7 @@
           </p:nvSpPr>
           <p:spPr>
             <a:xfrm>
-              <a:off x="1207922" y="4229263"/>
+              <a:off x="1207922" y="4992588"/>
               <a:ext cx="2156155" cy="106619"/>
             </a:xfrm>
             <a:prstGeom prst="rect">
@@ -3750,7 +3750,7 @@
           </p:nvSpPr>
           <p:spPr>
             <a:xfrm>
-              <a:off x="1321948" y="4430431"/>
+              <a:off x="1321948" y="5193756"/>
               <a:ext cx="1928103" cy="106619"/>
             </a:xfrm>
             <a:prstGeom prst="rect">
@@ -3793,7 +3793,7 @@
           </p:nvSpPr>
           <p:spPr>
             <a:xfrm>
-              <a:off x="3756290" y="4013263"/>
+              <a:off x="3756290" y="4776588"/>
               <a:ext cx="2545818" cy="739787"/>
             </a:xfrm>
             <a:custGeom>
@@ -3980,7 +3980,7 @@
           </p:nvSpPr>
           <p:spPr>
             <a:xfrm>
-              <a:off x="3972290" y="4229263"/>
+              <a:off x="3972290" y="4992588"/>
               <a:ext cx="2113818" cy="106619"/>
             </a:xfrm>
             <a:prstGeom prst="rect">
@@ -4023,7 +4023,7 @@
           </p:nvSpPr>
           <p:spPr>
             <a:xfrm>
-              <a:off x="4043476" y="4430431"/>
+              <a:off x="4043476" y="5193756"/>
               <a:ext cx="1971446" cy="106619"/>
             </a:xfrm>
             <a:prstGeom prst="rect">
@@ -4066,21 +4066,21 @@
           </p:nvSpPr>
           <p:spPr>
             <a:xfrm>
-              <a:off x="3657600" y="1683448"/>
-              <a:ext cx="1398464" cy="218900"/>
+              <a:off x="3638744" y="1683448"/>
+              <a:ext cx="18855" cy="695978"/>
             </a:xfrm>
             <a:custGeom>
               <a:avLst/>
               <a:pathLst>
-                <a:path w="1398464" h="218900">
+                <a:path w="18855" h="695978">
                   <a:moveTo>
-                    <a:pt x="0" y="0"/>
+                    <a:pt x="18855" y="0"/>
                   </a:moveTo>
                   <a:lnTo>
-                    <a:pt x="0" y="218900"/>
-                  </a:lnTo>
-                  <a:lnTo>
-                    <a:pt x="1398464" y="218900"/>
+                    <a:pt x="18855" y="695978"/>
+                  </a:lnTo>
+                  <a:lnTo>
+                    <a:pt x="0" y="695978"/>
                   </a:lnTo>
                 </a:path>
               </a:pathLst>
@@ -4109,7 +4109,7 @@
           </p:nvSpPr>
           <p:spPr>
             <a:xfrm>
-              <a:off x="5056064" y="1902349"/>
+              <a:off x="3638744" y="2379427"/>
               <a:ext cx="0" cy="0"/>
             </a:xfrm>
             <a:custGeom>
@@ -4153,17 +4153,17 @@
           <p:spPr>
             <a:xfrm>
               <a:off x="3657600" y="1683448"/>
-              <a:ext cx="0" cy="437801"/>
+              <a:ext cx="0" cy="1391957"/>
             </a:xfrm>
             <a:custGeom>
               <a:avLst/>
               <a:pathLst>
-                <a:path w="0" h="437801">
+                <a:path w="0" h="1391957">
                   <a:moveTo>
                     <a:pt x="0" y="0"/>
                   </a:moveTo>
                   <a:lnTo>
-                    <a:pt x="0" y="437801"/>
+                    <a:pt x="0" y="1391957"/>
                   </a:lnTo>
                 </a:path>
               </a:pathLst>
@@ -4192,7 +4192,7 @@
           </p:nvSpPr>
           <p:spPr>
             <a:xfrm>
-              <a:off x="3657600" y="2121250"/>
+              <a:off x="3657600" y="3075406"/>
               <a:ext cx="0" cy="0"/>
             </a:xfrm>
             <a:custGeom>
@@ -4235,24 +4235,24 @@
           </p:nvSpPr>
           <p:spPr>
             <a:xfrm>
-              <a:off x="2286000" y="3464541"/>
-              <a:ext cx="1371600" cy="548721"/>
+              <a:off x="2286000" y="4418697"/>
+              <a:ext cx="1371600" cy="357890"/>
             </a:xfrm>
             <a:custGeom>
               <a:avLst/>
               <a:pathLst>
-                <a:path w="1371600" h="548721">
+                <a:path w="1371600" h="357890">
                   <a:moveTo>
                     <a:pt x="1371600" y="0"/>
                   </a:moveTo>
                   <a:lnTo>
-                    <a:pt x="1371600" y="243740"/>
-                  </a:lnTo>
-                  <a:lnTo>
-                    <a:pt x="0" y="243740"/>
-                  </a:lnTo>
-                  <a:lnTo>
-                    <a:pt x="0" y="548721"/>
+                    <a:pt x="1371600" y="283902"/>
+                  </a:lnTo>
+                  <a:lnTo>
+                    <a:pt x="0" y="283902"/>
+                  </a:lnTo>
+                  <a:lnTo>
+                    <a:pt x="0" y="357890"/>
                   </a:lnTo>
                 </a:path>
               </a:pathLst>
@@ -4281,7 +4281,7 @@
           </p:nvSpPr>
           <p:spPr>
             <a:xfrm>
-              <a:off x="2286000" y="4013263"/>
+              <a:off x="2286000" y="4776588"/>
               <a:ext cx="0" cy="0"/>
             </a:xfrm>
             <a:custGeom>
@@ -4324,24 +4324,24 @@
           </p:nvSpPr>
           <p:spPr>
             <a:xfrm>
-              <a:off x="3657600" y="3464541"/>
-              <a:ext cx="1371600" cy="548721"/>
+              <a:off x="3657600" y="4418697"/>
+              <a:ext cx="1371600" cy="357890"/>
             </a:xfrm>
             <a:custGeom>
               <a:avLst/>
               <a:pathLst>
-                <a:path w="1371600" h="548721">
+                <a:path w="1371600" h="357890">
                   <a:moveTo>
                     <a:pt x="0" y="0"/>
                   </a:moveTo>
                   <a:lnTo>
-                    <a:pt x="0" y="243740"/>
-                  </a:lnTo>
-                  <a:lnTo>
-                    <a:pt x="1371600" y="243740"/>
-                  </a:lnTo>
-                  <a:lnTo>
-                    <a:pt x="1371600" y="548721"/>
+                    <a:pt x="0" y="283902"/>
+                  </a:lnTo>
+                  <a:lnTo>
+                    <a:pt x="1371600" y="283902"/>
+                  </a:lnTo>
+                  <a:lnTo>
+                    <a:pt x="1371600" y="357890"/>
                   </a:lnTo>
                 </a:path>
               </a:pathLst>
@@ -4370,7 +4370,7 @@
           </p:nvSpPr>
           <p:spPr>
             <a:xfrm>
-              <a:off x="5029200" y="4013263"/>
+              <a:off x="5029200" y="4776588"/>
               <a:ext cx="0" cy="0"/>
             </a:xfrm>
             <a:custGeom>

--- a/output/fig-flowchart/fig-flowchart.pptx
+++ b/output/fig-flowchart/fig-flowchart.pptx
@@ -2271,84 +2271,84 @@
           </p:nvSpPr>
           <p:spPr>
             <a:xfrm>
-              <a:off x="1926850" y="340157"/>
-              <a:ext cx="3461498" cy="1343291"/>
+              <a:off x="2064513" y="975772"/>
+              <a:ext cx="3186172" cy="1260446"/>
             </a:xfrm>
             <a:custGeom>
               <a:avLst/>
               <a:pathLst>
-                <a:path w="3461498" h="1343291">
+                <a:path w="3186172" h="1260446">
                   <a:moveTo>
-                    <a:pt x="63262" y="1343291"/>
+                    <a:pt x="63262" y="1260446"/>
                   </a:moveTo>
                   <a:lnTo>
-                    <a:pt x="3398235" y="1343291"/>
-                  </a:lnTo>
-                  <a:lnTo>
-                    <a:pt x="3395688" y="1343239"/>
-                  </a:lnTo>
-                  <a:lnTo>
-                    <a:pt x="3405861" y="1342829"/>
-                  </a:lnTo>
-                  <a:lnTo>
-                    <a:pt x="3415836" y="1340793"/>
-                  </a:lnTo>
-                  <a:lnTo>
-                    <a:pt x="3425356" y="1337183"/>
-                  </a:lnTo>
-                  <a:lnTo>
-                    <a:pt x="3434173" y="1332092"/>
-                  </a:lnTo>
-                  <a:lnTo>
-                    <a:pt x="3442059" y="1325653"/>
-                  </a:lnTo>
-                  <a:lnTo>
-                    <a:pt x="3448810" y="1318032"/>
-                  </a:lnTo>
-                  <a:lnTo>
-                    <a:pt x="3454252" y="1309427"/>
-                  </a:lnTo>
-                  <a:lnTo>
-                    <a:pt x="3458242" y="1300061"/>
-                  </a:lnTo>
-                  <a:lnTo>
-                    <a:pt x="3460679" y="1290176"/>
-                  </a:lnTo>
-                  <a:lnTo>
-                    <a:pt x="3461498" y="1280028"/>
-                  </a:lnTo>
-                  <a:lnTo>
-                    <a:pt x="3461498" y="63262"/>
-                  </a:lnTo>
-                  <a:lnTo>
-                    <a:pt x="3460679" y="53114"/>
-                  </a:lnTo>
-                  <a:lnTo>
-                    <a:pt x="3458242" y="43229"/>
-                  </a:lnTo>
-                  <a:lnTo>
-                    <a:pt x="3454252" y="33863"/>
-                  </a:lnTo>
-                  <a:lnTo>
-                    <a:pt x="3448810" y="25258"/>
-                  </a:lnTo>
-                  <a:lnTo>
-                    <a:pt x="3442059" y="17637"/>
-                  </a:lnTo>
-                  <a:lnTo>
-                    <a:pt x="3434173" y="11198"/>
-                  </a:lnTo>
-                  <a:lnTo>
-                    <a:pt x="3425356" y="6107"/>
-                  </a:lnTo>
-                  <a:lnTo>
-                    <a:pt x="3415836" y="2497"/>
-                  </a:lnTo>
-                  <a:lnTo>
-                    <a:pt x="3405861" y="461"/>
-                  </a:lnTo>
-                  <a:lnTo>
-                    <a:pt x="3398235" y="0"/>
+                    <a:pt x="3122910" y="1260446"/>
+                  </a:lnTo>
+                  <a:lnTo>
+                    <a:pt x="3120362" y="1260395"/>
+                  </a:lnTo>
+                  <a:lnTo>
+                    <a:pt x="3130535" y="1259985"/>
+                  </a:lnTo>
+                  <a:lnTo>
+                    <a:pt x="3140510" y="1257948"/>
+                  </a:lnTo>
+                  <a:lnTo>
+                    <a:pt x="3150030" y="1254338"/>
+                  </a:lnTo>
+                  <a:lnTo>
+                    <a:pt x="3158847" y="1249247"/>
+                  </a:lnTo>
+                  <a:lnTo>
+                    <a:pt x="3166733" y="1242808"/>
+                  </a:lnTo>
+                  <a:lnTo>
+                    <a:pt x="3173484" y="1235188"/>
+                  </a:lnTo>
+                  <a:lnTo>
+                    <a:pt x="3178926" y="1226583"/>
+                  </a:lnTo>
+                  <a:lnTo>
+                    <a:pt x="3182917" y="1217216"/>
+                  </a:lnTo>
+                  <a:lnTo>
+                    <a:pt x="3185353" y="1207331"/>
+                  </a:lnTo>
+                  <a:lnTo>
+                    <a:pt x="3186172" y="1197183"/>
+                  </a:lnTo>
+                  <a:lnTo>
+                    <a:pt x="3186172" y="63262"/>
+                  </a:lnTo>
+                  <a:lnTo>
+                    <a:pt x="3185353" y="53114"/>
+                  </a:lnTo>
+                  <a:lnTo>
+                    <a:pt x="3182917" y="43229"/>
+                  </a:lnTo>
+                  <a:lnTo>
+                    <a:pt x="3178926" y="33863"/>
+                  </a:lnTo>
+                  <a:lnTo>
+                    <a:pt x="3173484" y="25258"/>
+                  </a:lnTo>
+                  <a:lnTo>
+                    <a:pt x="3166733" y="17637"/>
+                  </a:lnTo>
+                  <a:lnTo>
+                    <a:pt x="3158847" y="11198"/>
+                  </a:lnTo>
+                  <a:lnTo>
+                    <a:pt x="3150030" y="6107"/>
+                  </a:lnTo>
+                  <a:lnTo>
+                    <a:pt x="3140510" y="2497"/>
+                  </a:lnTo>
+                  <a:lnTo>
+                    <a:pt x="3130535" y="461"/>
+                  </a:lnTo>
+                  <a:lnTo>
+                    <a:pt x="3122910" y="0"/>
                   </a:lnTo>
                   <a:lnTo>
                     <a:pt x="63262" y="0"/>
@@ -2390,40 +2390,40 @@
                     <a:pt x="0" y="63262"/>
                   </a:lnTo>
                   <a:lnTo>
-                    <a:pt x="0" y="1280028"/>
-                  </a:lnTo>
-                  <a:lnTo>
-                    <a:pt x="205" y="1274937"/>
-                  </a:lnTo>
-                  <a:lnTo>
-                    <a:pt x="205" y="1285118"/>
-                  </a:lnTo>
-                  <a:lnTo>
-                    <a:pt x="1838" y="1295168"/>
-                  </a:lnTo>
-                  <a:lnTo>
-                    <a:pt x="5062" y="1304825"/>
-                  </a:lnTo>
-                  <a:lnTo>
-                    <a:pt x="9793" y="1313840"/>
-                  </a:lnTo>
-                  <a:lnTo>
-                    <a:pt x="15909" y="1321979"/>
-                  </a:lnTo>
-                  <a:lnTo>
-                    <a:pt x="23252" y="1329031"/>
-                  </a:lnTo>
-                  <a:lnTo>
-                    <a:pt x="31631" y="1334815"/>
-                  </a:lnTo>
-                  <a:lnTo>
-                    <a:pt x="40829" y="1339179"/>
-                  </a:lnTo>
-                  <a:lnTo>
-                    <a:pt x="50608" y="1342012"/>
-                  </a:lnTo>
-                  <a:lnTo>
-                    <a:pt x="60715" y="1343239"/>
+                    <a:pt x="0" y="1197183"/>
+                  </a:lnTo>
+                  <a:lnTo>
+                    <a:pt x="205" y="1192093"/>
+                  </a:lnTo>
+                  <a:lnTo>
+                    <a:pt x="205" y="1202274"/>
+                  </a:lnTo>
+                  <a:lnTo>
+                    <a:pt x="1838" y="1212323"/>
+                  </a:lnTo>
+                  <a:lnTo>
+                    <a:pt x="5062" y="1221980"/>
+                  </a:lnTo>
+                  <a:lnTo>
+                    <a:pt x="9793" y="1230995"/>
+                  </a:lnTo>
+                  <a:lnTo>
+                    <a:pt x="15909" y="1239134"/>
+                  </a:lnTo>
+                  <a:lnTo>
+                    <a:pt x="23252" y="1246187"/>
+                  </a:lnTo>
+                  <a:lnTo>
+                    <a:pt x="31631" y="1251970"/>
+                  </a:lnTo>
+                  <a:lnTo>
+                    <a:pt x="40829" y="1256335"/>
+                  </a:lnTo>
+                  <a:lnTo>
+                    <a:pt x="50608" y="1259167"/>
+                  </a:lnTo>
+                  <a:lnTo>
+                    <a:pt x="60715" y="1260395"/>
                   </a:lnTo>
                   <a:close/>
                 </a:path>
@@ -2458,8 +2458,8 @@
           </p:nvSpPr>
           <p:spPr>
             <a:xfrm>
-              <a:off x="2142850" y="556157"/>
-              <a:ext cx="1321399" cy="106619"/>
+              <a:off x="2280513" y="1191772"/>
+              <a:ext cx="2299716" cy="96926"/>
             </a:xfrm>
             <a:prstGeom prst="rect">
               <a:avLst/>
@@ -2479,7 +2479,7 @@
                 </a:spcAft>
               </a:pPr>
               <a:r>
-                <a:rPr sz="1100" i="0" b="0">
+                <a:rPr sz="1000" i="0" b="0">
                   <a:solidFill>
                     <a:srgbClr val="333333">
                       <a:alpha val="100000"/>
@@ -2488,7 +2488,7 @@
                   <a:latin typeface="Luciole"/>
                   <a:cs typeface="Luciole"/>
                 </a:rPr>
-                <a:t>Éligibilité (N = 333)</a:t>
+                <a:t>Patients évalués pour éligibilité : 333</a:t>
               </a:r>
             </a:p>
           </p:txBody>
@@ -2501,8 +2501,8 @@
           </p:nvSpPr>
           <p:spPr>
             <a:xfrm>
-              <a:off x="2142850" y="757325"/>
-              <a:ext cx="1426464" cy="106619"/>
+              <a:off x="2280513" y="1374652"/>
+              <a:ext cx="1297167" cy="96926"/>
             </a:xfrm>
             <a:prstGeom prst="rect">
               <a:avLst/>
@@ -2522,7 +2522,7 @@
                 </a:spcAft>
               </a:pPr>
               <a:r>
-                <a:rPr sz="1100" i="0" b="0">
+                <a:rPr sz="1000" i="0" b="0">
                   <a:solidFill>
                     <a:srgbClr val="333333">
                       <a:alpha val="100000"/>
@@ -2544,8 +2544,8 @@
           </p:nvSpPr>
           <p:spPr>
             <a:xfrm>
-              <a:off x="2142850" y="958493"/>
-              <a:ext cx="3029498" cy="106619"/>
+              <a:off x="2280513" y="1557532"/>
+              <a:ext cx="2754172" cy="96926"/>
             </a:xfrm>
             <a:prstGeom prst="rect">
               <a:avLst/>
@@ -2565,7 +2565,7 @@
                 </a:spcAft>
               </a:pPr>
               <a:r>
-                <a:rPr sz="1100" i="0" b="0">
+                <a:rPr sz="1000" i="0" b="0">
                   <a:solidFill>
                     <a:srgbClr val="333333">
                       <a:alpha val="100000"/>
@@ -2587,8 +2587,8 @@
           </p:nvSpPr>
           <p:spPr>
             <a:xfrm>
-              <a:off x="2142850" y="1159661"/>
-              <a:ext cx="2757738" cy="106619"/>
+              <a:off x="2280513" y="1740412"/>
+              <a:ext cx="2507376" cy="96926"/>
             </a:xfrm>
             <a:prstGeom prst="rect">
               <a:avLst/>
@@ -2608,7 +2608,7 @@
                 </a:spcAft>
               </a:pPr>
               <a:r>
-                <a:rPr sz="1100" i="0" b="0">
+                <a:rPr sz="1000" i="0" b="0">
                   <a:solidFill>
                     <a:srgbClr val="333333">
                       <a:alpha val="100000"/>
@@ -2630,8 +2630,8 @@
           </p:nvSpPr>
           <p:spPr>
             <a:xfrm>
-              <a:off x="2142850" y="1360829"/>
-              <a:ext cx="3025018" cy="106619"/>
+              <a:off x="2280513" y="1923292"/>
+              <a:ext cx="2750332" cy="96926"/>
             </a:xfrm>
             <a:prstGeom prst="rect">
               <a:avLst/>
@@ -2651,7 +2651,7 @@
                 </a:spcAft>
               </a:pPr>
               <a:r>
-                <a:rPr sz="1100" i="0" b="0">
+                <a:rPr sz="1000" i="0" b="0">
                   <a:solidFill>
                     <a:srgbClr val="333333">
                       <a:alpha val="100000"/>
@@ -2673,84 +2673,84 @@
           </p:nvSpPr>
           <p:spPr>
             <a:xfrm>
-              <a:off x="3638744" y="1683047"/>
-              <a:ext cx="3969630" cy="1392760"/>
+              <a:off x="3867912" y="2203360"/>
+              <a:ext cx="3366675" cy="1291627"/>
             </a:xfrm>
             <a:custGeom>
               <a:avLst/>
               <a:pathLst>
-                <a:path w="3969630" h="1392760">
+                <a:path w="3366675" h="1291627">
                   <a:moveTo>
-                    <a:pt x="63262" y="1392760"/>
+                    <a:pt x="63262" y="1291627"/>
                   </a:moveTo>
                   <a:lnTo>
-                    <a:pt x="3906367" y="1392760"/>
-                  </a:lnTo>
-                  <a:lnTo>
-                    <a:pt x="3903820" y="1392708"/>
-                  </a:lnTo>
-                  <a:lnTo>
-                    <a:pt x="3913993" y="1392298"/>
-                  </a:lnTo>
-                  <a:lnTo>
-                    <a:pt x="3923968" y="1390262"/>
-                  </a:lnTo>
-                  <a:lnTo>
-                    <a:pt x="3933488" y="1386652"/>
-                  </a:lnTo>
-                  <a:lnTo>
-                    <a:pt x="3942305" y="1381561"/>
-                  </a:lnTo>
-                  <a:lnTo>
-                    <a:pt x="3950191" y="1375122"/>
-                  </a:lnTo>
-                  <a:lnTo>
-                    <a:pt x="3956942" y="1367501"/>
-                  </a:lnTo>
-                  <a:lnTo>
-                    <a:pt x="3962384" y="1358896"/>
-                  </a:lnTo>
-                  <a:lnTo>
-                    <a:pt x="3966374" y="1349530"/>
-                  </a:lnTo>
-                  <a:lnTo>
-                    <a:pt x="3968811" y="1339645"/>
-                  </a:lnTo>
-                  <a:lnTo>
-                    <a:pt x="3969630" y="1329497"/>
-                  </a:lnTo>
-                  <a:lnTo>
-                    <a:pt x="3969630" y="63262"/>
-                  </a:lnTo>
-                  <a:lnTo>
-                    <a:pt x="3968811" y="53114"/>
-                  </a:lnTo>
-                  <a:lnTo>
-                    <a:pt x="3966374" y="43229"/>
-                  </a:lnTo>
-                  <a:lnTo>
-                    <a:pt x="3962384" y="33863"/>
-                  </a:lnTo>
-                  <a:lnTo>
-                    <a:pt x="3956942" y="25258"/>
-                  </a:lnTo>
-                  <a:lnTo>
-                    <a:pt x="3950191" y="17637"/>
-                  </a:lnTo>
-                  <a:lnTo>
-                    <a:pt x="3942305" y="11198"/>
-                  </a:lnTo>
-                  <a:lnTo>
-                    <a:pt x="3933488" y="6107"/>
-                  </a:lnTo>
-                  <a:lnTo>
-                    <a:pt x="3923968" y="2497"/>
-                  </a:lnTo>
-                  <a:lnTo>
-                    <a:pt x="3913993" y="461"/>
-                  </a:lnTo>
-                  <a:lnTo>
-                    <a:pt x="3906367" y="0"/>
+                    <a:pt x="3303412" y="1291627"/>
+                  </a:lnTo>
+                  <a:lnTo>
+                    <a:pt x="3300865" y="1291576"/>
+                  </a:lnTo>
+                  <a:lnTo>
+                    <a:pt x="3311038" y="1291166"/>
+                  </a:lnTo>
+                  <a:lnTo>
+                    <a:pt x="3321013" y="1289129"/>
+                  </a:lnTo>
+                  <a:lnTo>
+                    <a:pt x="3330532" y="1285519"/>
+                  </a:lnTo>
+                  <a:lnTo>
+                    <a:pt x="3339349" y="1280428"/>
+                  </a:lnTo>
+                  <a:lnTo>
+                    <a:pt x="3347236" y="1273989"/>
+                  </a:lnTo>
+                  <a:lnTo>
+                    <a:pt x="3353987" y="1266369"/>
+                  </a:lnTo>
+                  <a:lnTo>
+                    <a:pt x="3359428" y="1257764"/>
+                  </a:lnTo>
+                  <a:lnTo>
+                    <a:pt x="3363419" y="1248397"/>
+                  </a:lnTo>
+                  <a:lnTo>
+                    <a:pt x="3365856" y="1238512"/>
+                  </a:lnTo>
+                  <a:lnTo>
+                    <a:pt x="3366675" y="1228364"/>
+                  </a:lnTo>
+                  <a:lnTo>
+                    <a:pt x="3366675" y="63262"/>
+                  </a:lnTo>
+                  <a:lnTo>
+                    <a:pt x="3365856" y="53114"/>
+                  </a:lnTo>
+                  <a:lnTo>
+                    <a:pt x="3363419" y="43229"/>
+                  </a:lnTo>
+                  <a:lnTo>
+                    <a:pt x="3359428" y="33863"/>
+                  </a:lnTo>
+                  <a:lnTo>
+                    <a:pt x="3353987" y="25258"/>
+                  </a:lnTo>
+                  <a:lnTo>
+                    <a:pt x="3347236" y="17637"/>
+                  </a:lnTo>
+                  <a:lnTo>
+                    <a:pt x="3339349" y="11198"/>
+                  </a:lnTo>
+                  <a:lnTo>
+                    <a:pt x="3330532" y="6107"/>
+                  </a:lnTo>
+                  <a:lnTo>
+                    <a:pt x="3321013" y="2497"/>
+                  </a:lnTo>
+                  <a:lnTo>
+                    <a:pt x="3311038" y="461"/>
+                  </a:lnTo>
+                  <a:lnTo>
+                    <a:pt x="3303412" y="0"/>
                   </a:lnTo>
                   <a:lnTo>
                     <a:pt x="63262" y="0"/>
@@ -2792,40 +2792,40 @@
                     <a:pt x="0" y="63262"/>
                   </a:lnTo>
                   <a:lnTo>
-                    <a:pt x="0" y="1329497"/>
-                  </a:lnTo>
-                  <a:lnTo>
-                    <a:pt x="205" y="1324406"/>
-                  </a:lnTo>
-                  <a:lnTo>
-                    <a:pt x="205" y="1334587"/>
-                  </a:lnTo>
-                  <a:lnTo>
-                    <a:pt x="1838" y="1344637"/>
-                  </a:lnTo>
-                  <a:lnTo>
-                    <a:pt x="5062" y="1354294"/>
-                  </a:lnTo>
-                  <a:lnTo>
-                    <a:pt x="9793" y="1363309"/>
-                  </a:lnTo>
-                  <a:lnTo>
-                    <a:pt x="15909" y="1371448"/>
-                  </a:lnTo>
-                  <a:lnTo>
-                    <a:pt x="23252" y="1378500"/>
-                  </a:lnTo>
-                  <a:lnTo>
-                    <a:pt x="31631" y="1384284"/>
-                  </a:lnTo>
-                  <a:lnTo>
-                    <a:pt x="40829" y="1388649"/>
-                  </a:lnTo>
-                  <a:lnTo>
-                    <a:pt x="50608" y="1391481"/>
-                  </a:lnTo>
-                  <a:lnTo>
-                    <a:pt x="60715" y="1392708"/>
+                    <a:pt x="0" y="1228364"/>
+                  </a:lnTo>
+                  <a:lnTo>
+                    <a:pt x="205" y="1223274"/>
+                  </a:lnTo>
+                  <a:lnTo>
+                    <a:pt x="205" y="1233455"/>
+                  </a:lnTo>
+                  <a:lnTo>
+                    <a:pt x="1838" y="1243504"/>
+                  </a:lnTo>
+                  <a:lnTo>
+                    <a:pt x="5062" y="1253161"/>
+                  </a:lnTo>
+                  <a:lnTo>
+                    <a:pt x="9793" y="1262176"/>
+                  </a:lnTo>
+                  <a:lnTo>
+                    <a:pt x="15909" y="1270315"/>
+                  </a:lnTo>
+                  <a:lnTo>
+                    <a:pt x="23252" y="1277368"/>
+                  </a:lnTo>
+                  <a:lnTo>
+                    <a:pt x="31631" y="1283151"/>
+                  </a:lnTo>
+                  <a:lnTo>
+                    <a:pt x="40829" y="1287516"/>
+                  </a:lnTo>
+                  <a:lnTo>
+                    <a:pt x="50608" y="1290348"/>
+                  </a:lnTo>
+                  <a:lnTo>
+                    <a:pt x="60715" y="1291576"/>
                   </a:lnTo>
                   <a:close/>
                 </a:path>
@@ -2860,8 +2860,8 @@
           </p:nvSpPr>
           <p:spPr>
             <a:xfrm>
-              <a:off x="3854744" y="1899047"/>
-              <a:ext cx="1717700" cy="92080"/>
+              <a:off x="4083911" y="2419360"/>
+              <a:ext cx="1661099" cy="82387"/>
             </a:xfrm>
             <a:prstGeom prst="rect">
               <a:avLst/>
@@ -2881,7 +2881,7 @@
                 </a:spcAft>
               </a:pPr>
               <a:r>
-                <a:rPr sz="950" i="0" b="0">
+                <a:rPr sz="850" i="0" b="0">
                   <a:solidFill>
                     <a:srgbClr val="555555">
                       <a:alpha val="100000"/>
@@ -2890,7 +2890,7 @@
                   <a:latin typeface="Luciole"/>
                   <a:cs typeface="Luciole"/>
                 </a:rPr>
-                <a:t>Exclusion (n = 230, 69,1 %)</a:t>
+                <a:t>Patients exclus : 230 (69,1 %)</a:t>
               </a:r>
             </a:p>
           </p:txBody>
@@ -2903,8 +2903,8 @@
           </p:nvSpPr>
           <p:spPr>
             <a:xfrm>
-              <a:off x="3854744" y="2072783"/>
-              <a:ext cx="2925531" cy="92080"/>
+              <a:off x="4083911" y="2574808"/>
+              <a:ext cx="2387132" cy="82387"/>
             </a:xfrm>
             <a:prstGeom prst="rect">
               <a:avLst/>
@@ -2924,7 +2924,7 @@
                 </a:spcAft>
               </a:pPr>
               <a:r>
-                <a:rPr sz="950" i="0" b="0">
+                <a:rPr sz="850" i="0" b="0">
                   <a:solidFill>
                     <a:srgbClr val="555555">
                       <a:alpha val="100000"/>
@@ -2933,7 +2933,7 @@
                   <a:latin typeface="Luciole"/>
                   <a:cs typeface="Luciole"/>
                 </a:rPr>
-                <a:t>- Autre diagnostic anatomopathologique (n = 85)</a:t>
+                <a:t>- Autre diagnostic anatomopathologique : 85</a:t>
               </a:r>
             </a:p>
           </p:txBody>
@@ -2946,8 +2946,8 @@
           </p:nvSpPr>
           <p:spPr>
             <a:xfrm>
-              <a:off x="3854744" y="2246519"/>
-              <a:ext cx="3368649" cy="92080"/>
+              <a:off x="4083911" y="2730256"/>
+              <a:ext cx="2783433" cy="82387"/>
             </a:xfrm>
             <a:prstGeom prst="rect">
               <a:avLst/>
@@ -2967,7 +2967,7 @@
                 </a:spcAft>
               </a:pPr>
               <a:r>
-                <a:rPr sz="950" i="0" b="0">
+                <a:rPr sz="850" i="0" b="0">
                   <a:solidFill>
                     <a:srgbClr val="555555">
                       <a:alpha val="100000"/>
@@ -2976,7 +2976,7 @@
                   <a:latin typeface="Luciole"/>
                   <a:cs typeface="Luciole"/>
                 </a:rPr>
-                <a:t>- Lésion non opérable ou d'emblée métastatique (n = 77)</a:t>
+                <a:t>- Lésion non opérable ou d'emblée métastatique : 77</a:t>
               </a:r>
             </a:p>
           </p:txBody>
@@ -2989,8 +2989,8 @@
           </p:nvSpPr>
           <p:spPr>
             <a:xfrm>
-              <a:off x="3854744" y="2420255"/>
-              <a:ext cx="1885675" cy="92080"/>
+              <a:off x="4083911" y="2885704"/>
+              <a:ext cx="1456639" cy="82387"/>
             </a:xfrm>
             <a:prstGeom prst="rect">
               <a:avLst/>
@@ -3010,7 +3010,7 @@
                 </a:spcAft>
               </a:pPr>
               <a:r>
-                <a:rPr sz="950" i="0" b="0">
+                <a:rPr sz="850" i="0" b="0">
                   <a:solidFill>
                     <a:srgbClr val="555555">
                       <a:alpha val="100000"/>
@@ -3019,7 +3019,7 @@
                   <a:latin typeface="Luciole"/>
                   <a:cs typeface="Luciole"/>
                 </a:rPr>
-                <a:t>- Données manquantes (n = 41)</a:t>
+                <a:t>- Données manquantes : 41</a:t>
               </a:r>
             </a:p>
           </p:txBody>
@@ -3032,8 +3032,8 @@
           </p:nvSpPr>
           <p:spPr>
             <a:xfrm>
-              <a:off x="3854744" y="2593991"/>
-              <a:ext cx="2641701" cy="92080"/>
+              <a:off x="4083911" y="3041152"/>
+              <a:ext cx="2133112" cy="82387"/>
             </a:xfrm>
             <a:prstGeom prst="rect">
               <a:avLst/>
@@ -3053,7 +3053,7 @@
                 </a:spcAft>
               </a:pPr>
               <a:r>
-                <a:rPr sz="950" i="0" b="0">
+                <a:rPr sz="850" i="0" b="0">
                   <a:solidFill>
                     <a:srgbClr val="555555">
                       <a:alpha val="100000"/>
@@ -3062,7 +3062,7 @@
                   <a:latin typeface="Luciole"/>
                   <a:cs typeface="Luciole"/>
                 </a:rPr>
-                <a:t>- Autre protocole de chimiothérapie (n = 16)</a:t>
+                <a:t>- Autre protocole de chimiothérapie : 16</a:t>
               </a:r>
             </a:p>
           </p:txBody>
@@ -3075,8 +3075,8 @@
           </p:nvSpPr>
           <p:spPr>
             <a:xfrm>
-              <a:off x="3854744" y="2767727"/>
-              <a:ext cx="3537630" cy="92080"/>
+              <a:off x="4083911" y="3196600"/>
+              <a:ext cx="2934675" cy="82387"/>
             </a:xfrm>
             <a:prstGeom prst="rect">
               <a:avLst/>
@@ -3096,7 +3096,7 @@
                 </a:spcAft>
               </a:pPr>
               <a:r>
-                <a:rPr sz="950" i="0" b="0">
+                <a:rPr sz="850" i="0" b="0">
                   <a:solidFill>
                     <a:srgbClr val="555555">
                       <a:alpha val="100000"/>
@@ -3105,7 +3105,7 @@
                   <a:latin typeface="Luciole"/>
                   <a:cs typeface="Luciole"/>
                 </a:rPr>
-                <a:t>- Décès précoce post-diagnostic ou post-opératoire (n = 11)</a:t>
+                <a:t>- Décès précoce post-diagnostic ou post-opératoire : 11</a:t>
               </a:r>
             </a:p>
           </p:txBody>
@@ -3118,84 +3118,84 @@
           </p:nvSpPr>
           <p:spPr>
             <a:xfrm>
-              <a:off x="2310761" y="3075406"/>
-              <a:ext cx="2693676" cy="1343291"/>
+              <a:off x="2473067" y="3462130"/>
+              <a:ext cx="2369064" cy="1260446"/>
             </a:xfrm>
             <a:custGeom>
               <a:avLst/>
               <a:pathLst>
-                <a:path w="2693676" h="1343291">
+                <a:path w="2369064" h="1260446">
                   <a:moveTo>
-                    <a:pt x="63262" y="1343291"/>
+                    <a:pt x="63262" y="1260446"/>
                   </a:moveTo>
                   <a:lnTo>
-                    <a:pt x="2630414" y="1343291"/>
-                  </a:lnTo>
-                  <a:lnTo>
-                    <a:pt x="2627866" y="1343239"/>
-                  </a:lnTo>
-                  <a:lnTo>
-                    <a:pt x="2638039" y="1342829"/>
-                  </a:lnTo>
-                  <a:lnTo>
-                    <a:pt x="2648015" y="1340793"/>
-                  </a:lnTo>
-                  <a:lnTo>
-                    <a:pt x="2657534" y="1337183"/>
-                  </a:lnTo>
-                  <a:lnTo>
-                    <a:pt x="2666351" y="1332092"/>
-                  </a:lnTo>
-                  <a:lnTo>
-                    <a:pt x="2674237" y="1325653"/>
-                  </a:lnTo>
-                  <a:lnTo>
-                    <a:pt x="2680989" y="1318032"/>
-                  </a:lnTo>
-                  <a:lnTo>
-                    <a:pt x="2686430" y="1309427"/>
-                  </a:lnTo>
-                  <a:lnTo>
-                    <a:pt x="2690421" y="1300061"/>
-                  </a:lnTo>
-                  <a:lnTo>
-                    <a:pt x="2692857" y="1290176"/>
-                  </a:lnTo>
-                  <a:lnTo>
-                    <a:pt x="2693676" y="1280028"/>
-                  </a:lnTo>
-                  <a:lnTo>
-                    <a:pt x="2693676" y="63262"/>
-                  </a:lnTo>
-                  <a:lnTo>
-                    <a:pt x="2692857" y="53114"/>
-                  </a:lnTo>
-                  <a:lnTo>
-                    <a:pt x="2690421" y="43229"/>
-                  </a:lnTo>
-                  <a:lnTo>
-                    <a:pt x="2686430" y="33863"/>
-                  </a:lnTo>
-                  <a:lnTo>
-                    <a:pt x="2680989" y="25258"/>
-                  </a:lnTo>
-                  <a:lnTo>
-                    <a:pt x="2674237" y="17637"/>
-                  </a:lnTo>
-                  <a:lnTo>
-                    <a:pt x="2666351" y="11198"/>
-                  </a:lnTo>
-                  <a:lnTo>
-                    <a:pt x="2657534" y="6107"/>
-                  </a:lnTo>
-                  <a:lnTo>
-                    <a:pt x="2648015" y="2497"/>
-                  </a:lnTo>
-                  <a:lnTo>
-                    <a:pt x="2638039" y="461"/>
-                  </a:lnTo>
-                  <a:lnTo>
-                    <a:pt x="2630414" y="0"/>
+                    <a:pt x="2305802" y="1260446"/>
+                  </a:lnTo>
+                  <a:lnTo>
+                    <a:pt x="2303254" y="1260395"/>
+                  </a:lnTo>
+                  <a:lnTo>
+                    <a:pt x="2313427" y="1259985"/>
+                  </a:lnTo>
+                  <a:lnTo>
+                    <a:pt x="2323403" y="1257948"/>
+                  </a:lnTo>
+                  <a:lnTo>
+                    <a:pt x="2332922" y="1254338"/>
+                  </a:lnTo>
+                  <a:lnTo>
+                    <a:pt x="2341739" y="1249247"/>
+                  </a:lnTo>
+                  <a:lnTo>
+                    <a:pt x="2349625" y="1242808"/>
+                  </a:lnTo>
+                  <a:lnTo>
+                    <a:pt x="2356377" y="1235188"/>
+                  </a:lnTo>
+                  <a:lnTo>
+                    <a:pt x="2361818" y="1226583"/>
+                  </a:lnTo>
+                  <a:lnTo>
+                    <a:pt x="2365809" y="1217216"/>
+                  </a:lnTo>
+                  <a:lnTo>
+                    <a:pt x="2368245" y="1207331"/>
+                  </a:lnTo>
+                  <a:lnTo>
+                    <a:pt x="2369064" y="1197183"/>
+                  </a:lnTo>
+                  <a:lnTo>
+                    <a:pt x="2369064" y="63262"/>
+                  </a:lnTo>
+                  <a:lnTo>
+                    <a:pt x="2368245" y="53114"/>
+                  </a:lnTo>
+                  <a:lnTo>
+                    <a:pt x="2365809" y="43229"/>
+                  </a:lnTo>
+                  <a:lnTo>
+                    <a:pt x="2361818" y="33863"/>
+                  </a:lnTo>
+                  <a:lnTo>
+                    <a:pt x="2356377" y="25258"/>
+                  </a:lnTo>
+                  <a:lnTo>
+                    <a:pt x="2349625" y="17637"/>
+                  </a:lnTo>
+                  <a:lnTo>
+                    <a:pt x="2341739" y="11198"/>
+                  </a:lnTo>
+                  <a:lnTo>
+                    <a:pt x="2332922" y="6107"/>
+                  </a:lnTo>
+                  <a:lnTo>
+                    <a:pt x="2323403" y="2497"/>
+                  </a:lnTo>
+                  <a:lnTo>
+                    <a:pt x="2313427" y="461"/>
+                  </a:lnTo>
+                  <a:lnTo>
+                    <a:pt x="2305802" y="0"/>
                   </a:lnTo>
                   <a:lnTo>
                     <a:pt x="63262" y="0"/>
@@ -3237,40 +3237,40 @@
                     <a:pt x="0" y="63262"/>
                   </a:lnTo>
                   <a:lnTo>
-                    <a:pt x="0" y="1280028"/>
-                  </a:lnTo>
-                  <a:lnTo>
-                    <a:pt x="205" y="1274937"/>
-                  </a:lnTo>
-                  <a:lnTo>
-                    <a:pt x="205" y="1285118"/>
-                  </a:lnTo>
-                  <a:lnTo>
-                    <a:pt x="1838" y="1295168"/>
-                  </a:lnTo>
-                  <a:lnTo>
-                    <a:pt x="5062" y="1304825"/>
-                  </a:lnTo>
-                  <a:lnTo>
-                    <a:pt x="9793" y="1313840"/>
-                  </a:lnTo>
-                  <a:lnTo>
-                    <a:pt x="15909" y="1321979"/>
-                  </a:lnTo>
-                  <a:lnTo>
-                    <a:pt x="23252" y="1329031"/>
-                  </a:lnTo>
-                  <a:lnTo>
-                    <a:pt x="31631" y="1334815"/>
-                  </a:lnTo>
-                  <a:lnTo>
-                    <a:pt x="40829" y="1339179"/>
-                  </a:lnTo>
-                  <a:lnTo>
-                    <a:pt x="50608" y="1342012"/>
-                  </a:lnTo>
-                  <a:lnTo>
-                    <a:pt x="60715" y="1343239"/>
+                    <a:pt x="0" y="1197183"/>
+                  </a:lnTo>
+                  <a:lnTo>
+                    <a:pt x="205" y="1192093"/>
+                  </a:lnTo>
+                  <a:lnTo>
+                    <a:pt x="205" y="1202274"/>
+                  </a:lnTo>
+                  <a:lnTo>
+                    <a:pt x="1838" y="1212323"/>
+                  </a:lnTo>
+                  <a:lnTo>
+                    <a:pt x="5062" y="1221980"/>
+                  </a:lnTo>
+                  <a:lnTo>
+                    <a:pt x="9793" y="1230995"/>
+                  </a:lnTo>
+                  <a:lnTo>
+                    <a:pt x="15909" y="1239134"/>
+                  </a:lnTo>
+                  <a:lnTo>
+                    <a:pt x="23252" y="1246187"/>
+                  </a:lnTo>
+                  <a:lnTo>
+                    <a:pt x="31631" y="1251970"/>
+                  </a:lnTo>
+                  <a:lnTo>
+                    <a:pt x="40829" y="1256335"/>
+                  </a:lnTo>
+                  <a:lnTo>
+                    <a:pt x="50608" y="1259167"/>
+                  </a:lnTo>
+                  <a:lnTo>
+                    <a:pt x="60715" y="1260395"/>
                   </a:lnTo>
                   <a:close/>
                 </a:path>
@@ -3305,8 +3305,8 @@
           </p:nvSpPr>
           <p:spPr>
             <a:xfrm>
-              <a:off x="2526761" y="3291406"/>
-              <a:ext cx="1995677" cy="106619"/>
+              <a:off x="2689067" y="3678130"/>
+              <a:ext cx="1937064" cy="96926"/>
             </a:xfrm>
             <a:prstGeom prst="rect">
               <a:avLst/>
@@ -3326,7 +3326,7 @@
                 </a:spcAft>
               </a:pPr>
               <a:r>
-                <a:rPr sz="1100" i="0" b="0">
+                <a:rPr sz="1000" i="0" b="0">
                   <a:solidFill>
                     <a:srgbClr val="333333">
                       <a:alpha val="100000"/>
@@ -3335,7 +3335,7 @@
                   <a:latin typeface="Luciole"/>
                   <a:cs typeface="Luciole"/>
                 </a:rPr>
-                <a:t>Inclusion (n = 103, 30,9 %)</a:t>
+                <a:t>Patients inclus : 103 (30,9 %)</a:t>
               </a:r>
             </a:p>
           </p:txBody>
@@ -3348,8 +3348,8 @@
           </p:nvSpPr>
           <p:spPr>
             <a:xfrm>
-              <a:off x="2526761" y="3492574"/>
-              <a:ext cx="1535369" cy="106619"/>
+              <a:off x="2689067" y="3861010"/>
+              <a:ext cx="1124894" cy="96926"/>
             </a:xfrm>
             <a:prstGeom prst="rect">
               <a:avLst/>
@@ -3369,7 +3369,7 @@
                 </a:spcAft>
               </a:pPr>
               <a:r>
-                <a:rPr sz="1100" i="0" b="0">
+                <a:rPr sz="1000" i="0" b="0">
                   <a:solidFill>
                     <a:srgbClr val="333333">
                       <a:alpha val="100000"/>
@@ -3378,7 +3378,7 @@
                   <a:latin typeface="Luciole"/>
                   <a:cs typeface="Luciole"/>
                 </a:rPr>
-                <a:t>- CHU Angers (n = 36)</a:t>
+                <a:t>- CHU Angers : 36</a:t>
               </a:r>
             </a:p>
           </p:txBody>
@@ -3391,8 +3391,8 @@
           </p:nvSpPr>
           <p:spPr>
             <a:xfrm>
-              <a:off x="2526761" y="3693742"/>
-              <a:ext cx="1540306" cy="106619"/>
+              <a:off x="2689067" y="4043890"/>
+              <a:ext cx="1129466" cy="96926"/>
             </a:xfrm>
             <a:prstGeom prst="rect">
               <a:avLst/>
@@ -3412,7 +3412,7 @@
                 </a:spcAft>
               </a:pPr>
               <a:r>
-                <a:rPr sz="1100" i="0" b="0">
+                <a:rPr sz="1000" i="0" b="0">
                   <a:solidFill>
                     <a:srgbClr val="333333">
                       <a:alpha val="100000"/>
@@ -3421,7 +3421,7 @@
                   <a:latin typeface="Luciole"/>
                   <a:cs typeface="Luciole"/>
                 </a:rPr>
-                <a:t>- CHU Nantes (n = 25)</a:t>
+                <a:t>- CHU Nantes : 25</a:t>
               </a:r>
             </a:p>
           </p:txBody>
@@ -3434,8 +3434,8 @@
           </p:nvSpPr>
           <p:spPr>
             <a:xfrm>
-              <a:off x="2526761" y="3894910"/>
-              <a:ext cx="2261676" cy="106619"/>
+              <a:off x="2689067" y="4226770"/>
+              <a:ext cx="1785457" cy="96926"/>
             </a:xfrm>
             <a:prstGeom prst="rect">
               <a:avLst/>
@@ -3455,7 +3455,7 @@
                 </a:spcAft>
               </a:pPr>
               <a:r>
-                <a:rPr sz="1100" i="0" b="0">
+                <a:rPr sz="1000" i="0" b="0">
                   <a:solidFill>
                     <a:srgbClr val="333333">
                       <a:alpha val="100000"/>
@@ -3464,7 +3464,7 @@
                   <a:latin typeface="Luciole"/>
                   <a:cs typeface="Luciole"/>
                 </a:rPr>
-                <a:t>- CHD La Roche-sur-Yon (n = 25)</a:t>
+                <a:t>- CHD La Roche-sur-Yon : 25</a:t>
               </a:r>
             </a:p>
           </p:txBody>
@@ -3477,8 +3477,8 @@
           </p:nvSpPr>
           <p:spPr>
             <a:xfrm>
-              <a:off x="2526761" y="4096078"/>
-              <a:ext cx="1362821" cy="106619"/>
+              <a:off x="2689067" y="4409650"/>
+              <a:ext cx="968166" cy="96926"/>
             </a:xfrm>
             <a:prstGeom prst="rect">
               <a:avLst/>
@@ -3498,7 +3498,7 @@
                 </a:spcAft>
               </a:pPr>
               <a:r>
-                <a:rPr sz="1100" i="0" b="0">
+                <a:rPr sz="1000" i="0" b="0">
                   <a:solidFill>
                     <a:srgbClr val="333333">
                       <a:alpha val="100000"/>
@@ -3507,7 +3507,7 @@
                   <a:latin typeface="Luciole"/>
                   <a:cs typeface="Luciole"/>
                 </a:rPr>
-                <a:t>- CHU Lyon (n = 17)</a:t>
+                <a:t>- CHU Lyon : 17</a:t>
               </a:r>
             </a:p>
           </p:txBody>
@@ -3520,84 +3520,84 @@
           </p:nvSpPr>
           <p:spPr>
             <a:xfrm>
-              <a:off x="991922" y="4776588"/>
-              <a:ext cx="2588155" cy="739787"/>
+              <a:off x="1089854" y="4963687"/>
+              <a:ext cx="2392290" cy="894686"/>
             </a:xfrm>
             <a:custGeom>
               <a:avLst/>
               <a:pathLst>
-                <a:path w="2588155" h="739787">
+                <a:path w="2392290" h="894686">
                   <a:moveTo>
-                    <a:pt x="63262" y="739787"/>
+                    <a:pt x="63262" y="894686"/>
                   </a:moveTo>
                   <a:lnTo>
-                    <a:pt x="2524892" y="739787"/>
-                  </a:lnTo>
-                  <a:lnTo>
-                    <a:pt x="2522345" y="739735"/>
-                  </a:lnTo>
-                  <a:lnTo>
-                    <a:pt x="2532517" y="739325"/>
-                  </a:lnTo>
-                  <a:lnTo>
-                    <a:pt x="2542493" y="737289"/>
-                  </a:lnTo>
-                  <a:lnTo>
-                    <a:pt x="2552012" y="733679"/>
-                  </a:lnTo>
-                  <a:lnTo>
-                    <a:pt x="2560829" y="728588"/>
-                  </a:lnTo>
-                  <a:lnTo>
-                    <a:pt x="2568716" y="722149"/>
-                  </a:lnTo>
-                  <a:lnTo>
-                    <a:pt x="2575467" y="714528"/>
-                  </a:lnTo>
-                  <a:lnTo>
-                    <a:pt x="2580908" y="705923"/>
-                  </a:lnTo>
-                  <a:lnTo>
-                    <a:pt x="2584899" y="696557"/>
-                  </a:lnTo>
-                  <a:lnTo>
-                    <a:pt x="2587335" y="686672"/>
-                  </a:lnTo>
-                  <a:lnTo>
-                    <a:pt x="2588155" y="676524"/>
-                  </a:lnTo>
-                  <a:lnTo>
-                    <a:pt x="2588155" y="63262"/>
-                  </a:lnTo>
-                  <a:lnTo>
-                    <a:pt x="2587335" y="53114"/>
-                  </a:lnTo>
-                  <a:lnTo>
-                    <a:pt x="2584899" y="43229"/>
-                  </a:lnTo>
-                  <a:lnTo>
-                    <a:pt x="2580908" y="33863"/>
-                  </a:lnTo>
-                  <a:lnTo>
-                    <a:pt x="2575467" y="25258"/>
-                  </a:lnTo>
-                  <a:lnTo>
-                    <a:pt x="2568716" y="17637"/>
-                  </a:lnTo>
-                  <a:lnTo>
-                    <a:pt x="2560829" y="11198"/>
-                  </a:lnTo>
-                  <a:lnTo>
-                    <a:pt x="2552012" y="6107"/>
-                  </a:lnTo>
-                  <a:lnTo>
-                    <a:pt x="2542493" y="2497"/>
-                  </a:lnTo>
-                  <a:lnTo>
-                    <a:pt x="2532517" y="461"/>
-                  </a:lnTo>
-                  <a:lnTo>
-                    <a:pt x="2524892" y="0"/>
+                    <a:pt x="2329027" y="894686"/>
+                  </a:lnTo>
+                  <a:lnTo>
+                    <a:pt x="2326480" y="894635"/>
+                  </a:lnTo>
+                  <a:lnTo>
+                    <a:pt x="2336653" y="894225"/>
+                  </a:lnTo>
+                  <a:lnTo>
+                    <a:pt x="2346628" y="892188"/>
+                  </a:lnTo>
+                  <a:lnTo>
+                    <a:pt x="2356148" y="888578"/>
+                  </a:lnTo>
+                  <a:lnTo>
+                    <a:pt x="2364965" y="883487"/>
+                  </a:lnTo>
+                  <a:lnTo>
+                    <a:pt x="2372851" y="877048"/>
+                  </a:lnTo>
+                  <a:lnTo>
+                    <a:pt x="2379602" y="869428"/>
+                  </a:lnTo>
+                  <a:lnTo>
+                    <a:pt x="2385044" y="860823"/>
+                  </a:lnTo>
+                  <a:lnTo>
+                    <a:pt x="2389034" y="851456"/>
+                  </a:lnTo>
+                  <a:lnTo>
+                    <a:pt x="2391471" y="841571"/>
+                  </a:lnTo>
+                  <a:lnTo>
+                    <a:pt x="2392290" y="831423"/>
+                  </a:lnTo>
+                  <a:lnTo>
+                    <a:pt x="2392290" y="63262"/>
+                  </a:lnTo>
+                  <a:lnTo>
+                    <a:pt x="2391471" y="53114"/>
+                  </a:lnTo>
+                  <a:lnTo>
+                    <a:pt x="2389034" y="43229"/>
+                  </a:lnTo>
+                  <a:lnTo>
+                    <a:pt x="2385044" y="33863"/>
+                  </a:lnTo>
+                  <a:lnTo>
+                    <a:pt x="2379602" y="25258"/>
+                  </a:lnTo>
+                  <a:lnTo>
+                    <a:pt x="2372851" y="17637"/>
+                  </a:lnTo>
+                  <a:lnTo>
+                    <a:pt x="2364965" y="11198"/>
+                  </a:lnTo>
+                  <a:lnTo>
+                    <a:pt x="2356148" y="6107"/>
+                  </a:lnTo>
+                  <a:lnTo>
+                    <a:pt x="2346628" y="2497"/>
+                  </a:lnTo>
+                  <a:lnTo>
+                    <a:pt x="2336653" y="461"/>
+                  </a:lnTo>
+                  <a:lnTo>
+                    <a:pt x="2329027" y="0"/>
                   </a:lnTo>
                   <a:lnTo>
                     <a:pt x="63262" y="0"/>
@@ -3639,40 +3639,40 @@
                     <a:pt x="0" y="63262"/>
                   </a:lnTo>
                   <a:lnTo>
-                    <a:pt x="0" y="676524"/>
-                  </a:lnTo>
-                  <a:lnTo>
-                    <a:pt x="205" y="671433"/>
-                  </a:lnTo>
-                  <a:lnTo>
-                    <a:pt x="205" y="681614"/>
-                  </a:lnTo>
-                  <a:lnTo>
-                    <a:pt x="1838" y="691664"/>
-                  </a:lnTo>
-                  <a:lnTo>
-                    <a:pt x="5062" y="701321"/>
-                  </a:lnTo>
-                  <a:lnTo>
-                    <a:pt x="9793" y="710336"/>
-                  </a:lnTo>
-                  <a:lnTo>
-                    <a:pt x="15909" y="718475"/>
-                  </a:lnTo>
-                  <a:lnTo>
-                    <a:pt x="23252" y="725527"/>
-                  </a:lnTo>
-                  <a:lnTo>
-                    <a:pt x="31631" y="731311"/>
-                  </a:lnTo>
-                  <a:lnTo>
-                    <a:pt x="40829" y="735675"/>
-                  </a:lnTo>
-                  <a:lnTo>
-                    <a:pt x="50608" y="738508"/>
-                  </a:lnTo>
-                  <a:lnTo>
-                    <a:pt x="60715" y="739735"/>
+                    <a:pt x="0" y="831423"/>
+                  </a:lnTo>
+                  <a:lnTo>
+                    <a:pt x="205" y="826333"/>
+                  </a:lnTo>
+                  <a:lnTo>
+                    <a:pt x="205" y="836514"/>
+                  </a:lnTo>
+                  <a:lnTo>
+                    <a:pt x="1838" y="846563"/>
+                  </a:lnTo>
+                  <a:lnTo>
+                    <a:pt x="5062" y="856220"/>
+                  </a:lnTo>
+                  <a:lnTo>
+                    <a:pt x="9793" y="865235"/>
+                  </a:lnTo>
+                  <a:lnTo>
+                    <a:pt x="15909" y="873374"/>
+                  </a:lnTo>
+                  <a:lnTo>
+                    <a:pt x="23252" y="880427"/>
+                  </a:lnTo>
+                  <a:lnTo>
+                    <a:pt x="31631" y="886210"/>
+                  </a:lnTo>
+                  <a:lnTo>
+                    <a:pt x="40829" y="890575"/>
+                  </a:lnTo>
+                  <a:lnTo>
+                    <a:pt x="50608" y="893407"/>
+                  </a:lnTo>
+                  <a:lnTo>
+                    <a:pt x="60715" y="894635"/>
                   </a:lnTo>
                   <a:close/>
                 </a:path>
@@ -3707,8 +3707,8 @@
           </p:nvSpPr>
           <p:spPr>
             <a:xfrm>
-              <a:off x="1207922" y="4992588"/>
-              <a:ext cx="2156155" cy="106619"/>
+              <a:off x="1305854" y="5179687"/>
+              <a:ext cx="1960290" cy="96926"/>
             </a:xfrm>
             <a:prstGeom prst="rect">
               <a:avLst/>
@@ -3728,7 +3728,7 @@
                 </a:spcAft>
               </a:pPr>
               <a:r>
-                <a:rPr sz="1100" i="0" b="0">
+                <a:rPr sz="1000" i="0" b="0">
                   <a:solidFill>
                     <a:srgbClr val="333333">
                       <a:alpha val="100000"/>
@@ -3750,8 +3750,8 @@
           </p:nvSpPr>
           <p:spPr>
             <a:xfrm>
-              <a:off x="1321948" y="5193756"/>
-              <a:ext cx="1928103" cy="106619"/>
+              <a:off x="2080991" y="5362567"/>
+              <a:ext cx="410016" cy="96926"/>
             </a:xfrm>
             <a:prstGeom prst="rect">
               <a:avLst/>
@@ -3771,7 +3771,7 @@
                 </a:spcAft>
               </a:pPr>
               <a:r>
-                <a:rPr sz="1100" i="0" b="0">
+                <a:rPr sz="1000" i="0" b="0">
                   <a:solidFill>
                     <a:srgbClr val="333333">
                       <a:alpha val="100000"/>
@@ -3780,97 +3780,140 @@
                   <a:latin typeface="Luciole"/>
                   <a:cs typeface="Luciole"/>
                 </a:rPr>
-                <a:t>(n = 53, 51,5 % des inclus)</a:t>
+                <a:t>n = 53</a:t>
               </a:r>
             </a:p>
           </p:txBody>
         </p:sp>
         <p:sp>
           <p:nvSpPr>
-            <p:cNvPr id="26" name="pg26"/>
+            <p:cNvPr id="26" name="tx26"/>
             <p:cNvSpPr/>
             <p:nvPr/>
           </p:nvSpPr>
           <p:spPr>
             <a:xfrm>
-              <a:off x="3756290" y="4776588"/>
-              <a:ext cx="2545818" cy="739787"/>
+              <a:off x="1653052" y="5545447"/>
+              <a:ext cx="1265895" cy="96926"/>
+            </a:xfrm>
+            <a:prstGeom prst="rect">
+              <a:avLst/>
+            </a:prstGeom>
+            <a:noFill/>
+          </p:spPr>
+          <p:txBody>
+            <a:bodyPr lIns="0" rIns="0" tIns="0" bIns="0" anchorCtr="1" anchor="ctr" wrap="none"/>
+            <a:lstStyle/>
+            <a:p>
+              <a:pPr algn="l" marL="0" marR="0" indent="0">
+                <a:spcBef>
+                  <a:spcPts val="0"/>
+                </a:spcBef>
+                <a:spcAft>
+                  <a:spcPts val="0"/>
+                </a:spcAft>
+              </a:pPr>
+              <a:r>
+                <a:rPr sz="1000" i="0" b="0">
+                  <a:solidFill>
+                    <a:srgbClr val="333333">
+                      <a:alpha val="100000"/>
+                    </a:srgbClr>
+                  </a:solidFill>
+                  <a:latin typeface="Luciole"/>
+                  <a:cs typeface="Luciole"/>
+                </a:rPr>
+                <a:t>(51,5 % des inclus)</a:t>
+              </a:r>
+            </a:p>
+          </p:txBody>
+        </p:sp>
+        <p:sp>
+          <p:nvSpPr>
+            <p:cNvPr id="27" name="pg27"/>
+            <p:cNvSpPr/>
+            <p:nvPr/>
+          </p:nvSpPr>
+          <p:spPr>
+            <a:xfrm>
+              <a:off x="3852257" y="4963687"/>
+              <a:ext cx="2353885" cy="894686"/>
             </a:xfrm>
             <a:custGeom>
               <a:avLst/>
               <a:pathLst>
-                <a:path w="2545818" h="739787">
+                <a:path w="2353885" h="894686">
                   <a:moveTo>
-                    <a:pt x="63262" y="739787"/>
+                    <a:pt x="63262" y="894686"/>
                   </a:moveTo>
                   <a:lnTo>
-                    <a:pt x="2482555" y="739787"/>
-                  </a:lnTo>
-                  <a:lnTo>
-                    <a:pt x="2480008" y="739735"/>
-                  </a:lnTo>
-                  <a:lnTo>
-                    <a:pt x="2490181" y="739325"/>
-                  </a:lnTo>
-                  <a:lnTo>
-                    <a:pt x="2500156" y="737289"/>
-                  </a:lnTo>
-                  <a:lnTo>
-                    <a:pt x="2509675" y="733679"/>
-                  </a:lnTo>
-                  <a:lnTo>
-                    <a:pt x="2518493" y="728588"/>
-                  </a:lnTo>
-                  <a:lnTo>
-                    <a:pt x="2526379" y="722149"/>
-                  </a:lnTo>
-                  <a:lnTo>
-                    <a:pt x="2533130" y="714528"/>
-                  </a:lnTo>
-                  <a:lnTo>
-                    <a:pt x="2538572" y="705923"/>
-                  </a:lnTo>
-                  <a:lnTo>
-                    <a:pt x="2542562" y="696557"/>
-                  </a:lnTo>
-                  <a:lnTo>
-                    <a:pt x="2544999" y="686672"/>
-                  </a:lnTo>
-                  <a:lnTo>
-                    <a:pt x="2545818" y="676524"/>
-                  </a:lnTo>
-                  <a:lnTo>
-                    <a:pt x="2545818" y="63262"/>
-                  </a:lnTo>
-                  <a:lnTo>
-                    <a:pt x="2544999" y="53114"/>
-                  </a:lnTo>
-                  <a:lnTo>
-                    <a:pt x="2542562" y="43229"/>
-                  </a:lnTo>
-                  <a:lnTo>
-                    <a:pt x="2538572" y="33863"/>
-                  </a:lnTo>
-                  <a:lnTo>
-                    <a:pt x="2533130" y="25258"/>
-                  </a:lnTo>
-                  <a:lnTo>
-                    <a:pt x="2526379" y="17637"/>
-                  </a:lnTo>
-                  <a:lnTo>
-                    <a:pt x="2518493" y="11198"/>
-                  </a:lnTo>
-                  <a:lnTo>
-                    <a:pt x="2509675" y="6107"/>
-                  </a:lnTo>
-                  <a:lnTo>
-                    <a:pt x="2500156" y="2497"/>
-                  </a:lnTo>
-                  <a:lnTo>
-                    <a:pt x="2490181" y="461"/>
-                  </a:lnTo>
-                  <a:lnTo>
-                    <a:pt x="2482555" y="0"/>
+                    <a:pt x="2290623" y="894686"/>
+                  </a:lnTo>
+                  <a:lnTo>
+                    <a:pt x="2288075" y="894635"/>
+                  </a:lnTo>
+                  <a:lnTo>
+                    <a:pt x="2298248" y="894225"/>
+                  </a:lnTo>
+                  <a:lnTo>
+                    <a:pt x="2308223" y="892188"/>
+                  </a:lnTo>
+                  <a:lnTo>
+                    <a:pt x="2317743" y="888578"/>
+                  </a:lnTo>
+                  <a:lnTo>
+                    <a:pt x="2326560" y="883487"/>
+                  </a:lnTo>
+                  <a:lnTo>
+                    <a:pt x="2334446" y="877048"/>
+                  </a:lnTo>
+                  <a:lnTo>
+                    <a:pt x="2341198" y="869428"/>
+                  </a:lnTo>
+                  <a:lnTo>
+                    <a:pt x="2346639" y="860823"/>
+                  </a:lnTo>
+                  <a:lnTo>
+                    <a:pt x="2350630" y="851456"/>
+                  </a:lnTo>
+                  <a:lnTo>
+                    <a:pt x="2353066" y="841571"/>
+                  </a:lnTo>
+                  <a:lnTo>
+                    <a:pt x="2353885" y="831423"/>
+                  </a:lnTo>
+                  <a:lnTo>
+                    <a:pt x="2353885" y="63262"/>
+                  </a:lnTo>
+                  <a:lnTo>
+                    <a:pt x="2353066" y="53114"/>
+                  </a:lnTo>
+                  <a:lnTo>
+                    <a:pt x="2350630" y="43229"/>
+                  </a:lnTo>
+                  <a:lnTo>
+                    <a:pt x="2346639" y="33863"/>
+                  </a:lnTo>
+                  <a:lnTo>
+                    <a:pt x="2341198" y="25258"/>
+                  </a:lnTo>
+                  <a:lnTo>
+                    <a:pt x="2334446" y="17637"/>
+                  </a:lnTo>
+                  <a:lnTo>
+                    <a:pt x="2326560" y="11198"/>
+                  </a:lnTo>
+                  <a:lnTo>
+                    <a:pt x="2317743" y="6107"/>
+                  </a:lnTo>
+                  <a:lnTo>
+                    <a:pt x="2308223" y="2497"/>
+                  </a:lnTo>
+                  <a:lnTo>
+                    <a:pt x="2298248" y="461"/>
+                  </a:lnTo>
+                  <a:lnTo>
+                    <a:pt x="2290623" y="0"/>
                   </a:lnTo>
                   <a:lnTo>
                     <a:pt x="63262" y="0"/>
@@ -3912,40 +3955,40 @@
                     <a:pt x="0" y="63262"/>
                   </a:lnTo>
                   <a:lnTo>
-                    <a:pt x="0" y="676524"/>
-                  </a:lnTo>
-                  <a:lnTo>
-                    <a:pt x="205" y="671433"/>
-                  </a:lnTo>
-                  <a:lnTo>
-                    <a:pt x="205" y="681614"/>
-                  </a:lnTo>
-                  <a:lnTo>
-                    <a:pt x="1838" y="691664"/>
-                  </a:lnTo>
-                  <a:lnTo>
-                    <a:pt x="5062" y="701321"/>
-                  </a:lnTo>
-                  <a:lnTo>
-                    <a:pt x="9793" y="710336"/>
-                  </a:lnTo>
-                  <a:lnTo>
-                    <a:pt x="15909" y="718475"/>
-                  </a:lnTo>
-                  <a:lnTo>
-                    <a:pt x="23252" y="725527"/>
-                  </a:lnTo>
-                  <a:lnTo>
-                    <a:pt x="31631" y="731311"/>
-                  </a:lnTo>
-                  <a:lnTo>
-                    <a:pt x="40829" y="735675"/>
-                  </a:lnTo>
-                  <a:lnTo>
-                    <a:pt x="50608" y="738508"/>
-                  </a:lnTo>
-                  <a:lnTo>
-                    <a:pt x="60715" y="739735"/>
+                    <a:pt x="0" y="831423"/>
+                  </a:lnTo>
+                  <a:lnTo>
+                    <a:pt x="205" y="826333"/>
+                  </a:lnTo>
+                  <a:lnTo>
+                    <a:pt x="205" y="836514"/>
+                  </a:lnTo>
+                  <a:lnTo>
+                    <a:pt x="1838" y="846563"/>
+                  </a:lnTo>
+                  <a:lnTo>
+                    <a:pt x="5062" y="856220"/>
+                  </a:lnTo>
+                  <a:lnTo>
+                    <a:pt x="9793" y="865235"/>
+                  </a:lnTo>
+                  <a:lnTo>
+                    <a:pt x="15909" y="873374"/>
+                  </a:lnTo>
+                  <a:lnTo>
+                    <a:pt x="23252" y="880427"/>
+                  </a:lnTo>
+                  <a:lnTo>
+                    <a:pt x="31631" y="886210"/>
+                  </a:lnTo>
+                  <a:lnTo>
+                    <a:pt x="40829" y="890575"/>
+                  </a:lnTo>
+                  <a:lnTo>
+                    <a:pt x="50608" y="893407"/>
+                  </a:lnTo>
+                  <a:lnTo>
+                    <a:pt x="60715" y="894635"/>
                   </a:lnTo>
                   <a:close/>
                 </a:path>
@@ -3974,14 +4017,14 @@
         </p:sp>
         <p:sp>
           <p:nvSpPr>
-            <p:cNvPr id="27" name="tx27"/>
+            <p:cNvPr id="28" name="tx28"/>
             <p:cNvSpPr/>
             <p:nvPr/>
           </p:nvSpPr>
           <p:spPr>
             <a:xfrm>
-              <a:off x="3972290" y="4992588"/>
-              <a:ext cx="2113818" cy="106619"/>
+              <a:off x="4068257" y="5179687"/>
+              <a:ext cx="1921885" cy="96926"/>
             </a:xfrm>
             <a:prstGeom prst="rect">
               <a:avLst/>
@@ -4001,7 +4044,7 @@
                 </a:spcAft>
               </a:pPr>
               <a:r>
-                <a:rPr sz="1100" i="0" b="0">
+                <a:rPr sz="1000" i="0" b="0">
                   <a:solidFill>
                     <a:srgbClr val="333333">
                       <a:alpha val="100000"/>
@@ -4017,14 +4060,14 @@
         </p:sp>
         <p:sp>
           <p:nvSpPr>
-            <p:cNvPr id="28" name="tx28"/>
+            <p:cNvPr id="29" name="tx29"/>
             <p:cNvSpPr/>
             <p:nvPr/>
           </p:nvSpPr>
           <p:spPr>
             <a:xfrm>
-              <a:off x="4043476" y="5193756"/>
-              <a:ext cx="1971446" cy="106619"/>
+              <a:off x="4816419" y="5362567"/>
+              <a:ext cx="425561" cy="96926"/>
             </a:xfrm>
             <a:prstGeom prst="rect">
               <a:avLst/>
@@ -4044,7 +4087,7 @@
                 </a:spcAft>
               </a:pPr>
               <a:r>
-                <a:rPr sz="1100" i="0" b="0">
+                <a:rPr sz="1000" i="0" b="0">
                   <a:solidFill>
                     <a:srgbClr val="333333">
                       <a:alpha val="100000"/>
@@ -4053,34 +4096,77 @@
                   <a:latin typeface="Luciole"/>
                   <a:cs typeface="Luciole"/>
                 </a:rPr>
-                <a:t>(n = 50, 48,5 % des inclus)</a:t>
+                <a:t>n = 50</a:t>
               </a:r>
             </a:p>
           </p:txBody>
         </p:sp>
         <p:sp>
           <p:nvSpPr>
-            <p:cNvPr id="29" name="pl29"/>
+            <p:cNvPr id="30" name="tx30"/>
             <p:cNvSpPr/>
             <p:nvPr/>
           </p:nvSpPr>
           <p:spPr>
             <a:xfrm>
-              <a:off x="3638744" y="1683448"/>
-              <a:ext cx="18855" cy="695978"/>
+              <a:off x="4384410" y="5545447"/>
+              <a:ext cx="1289578" cy="96926"/>
+            </a:xfrm>
+            <a:prstGeom prst="rect">
+              <a:avLst/>
+            </a:prstGeom>
+            <a:noFill/>
+          </p:spPr>
+          <p:txBody>
+            <a:bodyPr lIns="0" rIns="0" tIns="0" bIns="0" anchorCtr="1" anchor="ctr" wrap="none"/>
+            <a:lstStyle/>
+            <a:p>
+              <a:pPr algn="l" marL="0" marR="0" indent="0">
+                <a:spcBef>
+                  <a:spcPts val="0"/>
+                </a:spcBef>
+                <a:spcAft>
+                  <a:spcPts val="0"/>
+                </a:spcAft>
+              </a:pPr>
+              <a:r>
+                <a:rPr sz="1000" i="0" b="0">
+                  <a:solidFill>
+                    <a:srgbClr val="333333">
+                      <a:alpha val="100000"/>
+                    </a:srgbClr>
+                  </a:solidFill>
+                  <a:latin typeface="Luciole"/>
+                  <a:cs typeface="Luciole"/>
+                </a:rPr>
+                <a:t>(48,5 % des inclus)</a:t>
+              </a:r>
+            </a:p>
+          </p:txBody>
+        </p:sp>
+        <p:sp>
+          <p:nvSpPr>
+            <p:cNvPr id="31" name="pl31"/>
+            <p:cNvSpPr/>
+            <p:nvPr/>
+          </p:nvSpPr>
+          <p:spPr>
+            <a:xfrm>
+              <a:off x="3657600" y="2236218"/>
+              <a:ext cx="210312" cy="612956"/>
             </a:xfrm>
             <a:custGeom>
               <a:avLst/>
               <a:pathLst>
-                <a:path w="18855" h="695978">
+                <a:path w="210312" h="612956">
                   <a:moveTo>
-                    <a:pt x="18855" y="0"/>
+                    <a:pt x="0" y="0"/>
                   </a:moveTo>
                   <a:lnTo>
-                    <a:pt x="18855" y="695978"/>
-                  </a:lnTo>
-                  <a:lnTo>
-                    <a:pt x="0" y="695978"/>
+                    <a:pt x="0" y="612956"/>
+                  </a:lnTo>
+                  <a:lnTo>
+                    <a:pt x="210312" y="612956"/>
                   </a:lnTo>
                 </a:path>
               </a:pathLst>
@@ -4103,13 +4189,13 @@
         </p:sp>
         <p:sp>
           <p:nvSpPr>
-            <p:cNvPr id="30" name="pl30"/>
+            <p:cNvPr id="32" name="pl32"/>
             <p:cNvSpPr/>
             <p:nvPr/>
           </p:nvSpPr>
           <p:spPr>
             <a:xfrm>
-              <a:off x="3638744" y="2379427"/>
+              <a:off x="3867912" y="2849174"/>
               <a:ext cx="0" cy="0"/>
             </a:xfrm>
             <a:custGeom>
@@ -4146,24 +4232,24 @@
         </p:sp>
         <p:sp>
           <p:nvSpPr>
-            <p:cNvPr id="31" name="pl31"/>
+            <p:cNvPr id="33" name="pl33"/>
             <p:cNvSpPr/>
             <p:nvPr/>
           </p:nvSpPr>
           <p:spPr>
             <a:xfrm>
-              <a:off x="3657600" y="1683448"/>
-              <a:ext cx="0" cy="1391957"/>
+              <a:off x="3657600" y="2236218"/>
+              <a:ext cx="0" cy="1225912"/>
             </a:xfrm>
             <a:custGeom>
               <a:avLst/>
               <a:pathLst>
-                <a:path w="0" h="1391957">
+                <a:path w="0" h="1225912">
                   <a:moveTo>
                     <a:pt x="0" y="0"/>
                   </a:moveTo>
                   <a:lnTo>
-                    <a:pt x="0" y="1391957"/>
+                    <a:pt x="0" y="1225912"/>
                   </a:lnTo>
                 </a:path>
               </a:pathLst>
@@ -4186,13 +4272,13 @@
         </p:sp>
         <p:sp>
           <p:nvSpPr>
-            <p:cNvPr id="32" name="pl32"/>
+            <p:cNvPr id="34" name="pl34"/>
             <p:cNvSpPr/>
             <p:nvPr/>
           </p:nvSpPr>
           <p:spPr>
             <a:xfrm>
-              <a:off x="3657600" y="3075406"/>
+              <a:off x="3657600" y="3462130"/>
               <a:ext cx="0" cy="0"/>
             </a:xfrm>
             <a:custGeom>
@@ -4229,119 +4315,30 @@
         </p:sp>
         <p:sp>
           <p:nvSpPr>
-            <p:cNvPr id="33" name="pl33"/>
-            <p:cNvSpPr/>
-            <p:nvPr/>
-          </p:nvSpPr>
-          <p:spPr>
-            <a:xfrm>
-              <a:off x="2286000" y="4418697"/>
-              <a:ext cx="1371600" cy="357890"/>
-            </a:xfrm>
-            <a:custGeom>
-              <a:avLst/>
-              <a:pathLst>
-                <a:path w="1371600" h="357890">
-                  <a:moveTo>
-                    <a:pt x="1371600" y="0"/>
-                  </a:moveTo>
-                  <a:lnTo>
-                    <a:pt x="1371600" y="283902"/>
-                  </a:lnTo>
-                  <a:lnTo>
-                    <a:pt x="0" y="283902"/>
-                  </a:lnTo>
-                  <a:lnTo>
-                    <a:pt x="0" y="357890"/>
-                  </a:lnTo>
-                </a:path>
-              </a:pathLst>
-            </a:custGeom>
-            <a:ln w="14287" cap="rnd">
-              <a:solidFill>
-                <a:srgbClr val="0099FF">
-                  <a:alpha val="100000"/>
-                </a:srgbClr>
-              </a:solidFill>
-              <a:prstDash val="solid"/>
-              <a:round/>
-            </a:ln>
-          </p:spPr>
-          <p:txBody>
-            <a:bodyPr/>
-            <a:lstStyle/>
-            <a:p/>
-          </p:txBody>
-        </p:sp>
-        <p:sp>
-          <p:nvSpPr>
-            <p:cNvPr id="34" name="pl34"/>
-            <p:cNvSpPr/>
-            <p:nvPr/>
-          </p:nvSpPr>
-          <p:spPr>
-            <a:xfrm>
-              <a:off x="2286000" y="4776588"/>
-              <a:ext cx="0" cy="0"/>
-            </a:xfrm>
-            <a:custGeom>
-              <a:avLst/>
-              <a:pathLst>
-                <a:path w="0" h="0">
-                  <a:moveTo>
-                    <a:pt x="0" y="0"/>
-                  </a:moveTo>
-                  <a:lnTo>
-                    <a:pt x="0" y="0"/>
-                  </a:lnTo>
-                  <a:lnTo>
-                    <a:pt x="0" y="0"/>
-                  </a:lnTo>
-                </a:path>
-              </a:pathLst>
-            </a:custGeom>
-            <a:ln w="14287" cap="rnd">
-              <a:solidFill>
-                <a:srgbClr val="0099FF">
-                  <a:alpha val="100000"/>
-                </a:srgbClr>
-              </a:solidFill>
-              <a:prstDash val="solid"/>
-              <a:round/>
-            </a:ln>
-          </p:spPr>
-          <p:txBody>
-            <a:bodyPr/>
-            <a:lstStyle/>
-            <a:p/>
-          </p:txBody>
-        </p:sp>
-        <p:sp>
-          <p:nvSpPr>
             <p:cNvPr id="35" name="pl35"/>
             <p:cNvSpPr/>
             <p:nvPr/>
           </p:nvSpPr>
           <p:spPr>
             <a:xfrm>
-              <a:off x="3657600" y="4418697"/>
-              <a:ext cx="1371600" cy="357890"/>
+              <a:off x="2286000" y="4722577"/>
+              <a:ext cx="1371600" cy="241110"/>
             </a:xfrm>
             <a:custGeom>
               <a:avLst/>
               <a:pathLst>
-                <a:path w="1371600" h="357890">
+                <a:path w="1371600" h="241110">
                   <a:moveTo>
-                    <a:pt x="0" y="0"/>
+                    <a:pt x="1371600" y="0"/>
                   </a:moveTo>
                   <a:lnTo>
-                    <a:pt x="0" y="283902"/>
-                  </a:lnTo>
-                  <a:lnTo>
-                    <a:pt x="1371600" y="283902"/>
-                  </a:lnTo>
-                  <a:lnTo>
-                    <a:pt x="1371600" y="357890"/>
+                    <a:pt x="1371600" y="219455"/>
+                  </a:lnTo>
+                  <a:lnTo>
+                    <a:pt x="0" y="219455"/>
+                  </a:lnTo>
+                  <a:lnTo>
+                    <a:pt x="0" y="241110"/>
                   </a:lnTo>
                 </a:path>
               </a:pathLst>
@@ -4370,7 +4367,96 @@
           </p:nvSpPr>
           <p:spPr>
             <a:xfrm>
-              <a:off x="5029200" y="4776588"/>
+              <a:off x="2286000" y="4963687"/>
+              <a:ext cx="0" cy="0"/>
+            </a:xfrm>
+            <a:custGeom>
+              <a:avLst/>
+              <a:pathLst>
+                <a:path w="0" h="0">
+                  <a:moveTo>
+                    <a:pt x="0" y="0"/>
+                  </a:moveTo>
+                  <a:lnTo>
+                    <a:pt x="0" y="0"/>
+                  </a:lnTo>
+                  <a:lnTo>
+                    <a:pt x="0" y="0"/>
+                  </a:lnTo>
+                </a:path>
+              </a:pathLst>
+            </a:custGeom>
+            <a:ln w="14287" cap="rnd">
+              <a:solidFill>
+                <a:srgbClr val="0099FF">
+                  <a:alpha val="100000"/>
+                </a:srgbClr>
+              </a:solidFill>
+              <a:prstDash val="solid"/>
+              <a:round/>
+            </a:ln>
+          </p:spPr>
+          <p:txBody>
+            <a:bodyPr/>
+            <a:lstStyle/>
+            <a:p/>
+          </p:txBody>
+        </p:sp>
+        <p:sp>
+          <p:nvSpPr>
+            <p:cNvPr id="37" name="pl37"/>
+            <p:cNvSpPr/>
+            <p:nvPr/>
+          </p:nvSpPr>
+          <p:spPr>
+            <a:xfrm>
+              <a:off x="3657600" y="4722577"/>
+              <a:ext cx="1371600" cy="241110"/>
+            </a:xfrm>
+            <a:custGeom>
+              <a:avLst/>
+              <a:pathLst>
+                <a:path w="1371600" h="241110">
+                  <a:moveTo>
+                    <a:pt x="0" y="0"/>
+                  </a:moveTo>
+                  <a:lnTo>
+                    <a:pt x="0" y="219455"/>
+                  </a:lnTo>
+                  <a:lnTo>
+                    <a:pt x="1371600" y="219455"/>
+                  </a:lnTo>
+                  <a:lnTo>
+                    <a:pt x="1371600" y="241110"/>
+                  </a:lnTo>
+                </a:path>
+              </a:pathLst>
+            </a:custGeom>
+            <a:ln w="14287" cap="rnd">
+              <a:solidFill>
+                <a:srgbClr val="0099FF">
+                  <a:alpha val="100000"/>
+                </a:srgbClr>
+              </a:solidFill>
+              <a:prstDash val="solid"/>
+              <a:round/>
+            </a:ln>
+          </p:spPr>
+          <p:txBody>
+            <a:bodyPr/>
+            <a:lstStyle/>
+            <a:p/>
+          </p:txBody>
+        </p:sp>
+        <p:sp>
+          <p:nvSpPr>
+            <p:cNvPr id="38" name="pl38"/>
+            <p:cNvSpPr/>
+            <p:nvPr/>
+          </p:nvSpPr>
+          <p:spPr>
+            <a:xfrm>
+              <a:off x="5029200" y="4963687"/>
               <a:ext cx="0" cy="0"/>
             </a:xfrm>
             <a:custGeom>
